--- a/Schools_ML_Track/camp_2026/slides/DA/DA09.pptx
+++ b/Schools_ML_Track/camp_2026/slides/DA/DA09.pptx
@@ -129,7 +129,7 @@
   <p:extLst>
     <p:ext uri="{521415D9-36F7-43E2-AB2F-B90AF26B5E84}">
       <p14:sectionLst xmlns:p14="http://schemas.microsoft.com/office/powerpoint/2010/main">
-        <p14:section name="Opening" id="{c6ec1a98-a6fa-cc3e-1377-0fbb2faa61d8}">
+        <p14:section name="Opening" id="{74fa7905-ec8f-fa48-f57a-22f17b8a1659}">
           <p14:sldIdLst>
             <p14:sldId id="256"/>
             <p14:sldId id="257"/>
@@ -140,7 +140,7 @@
             <p14:sldId id="262"/>
           </p14:sldIdLst>
         </p14:section>
-        <p14:section name="Block A" id="{d1cd3a73-465d-e421-610d-c8c3212d0d35}">
+        <p14:section name="Block A" id="{d682867d-4174-71b2-fd28-5e06b177c333}">
           <p14:sldIdLst>
             <p14:sldId id="263"/>
             <p14:sldId id="264"/>
@@ -150,15 +150,15 @@
             <p14:sldId id="269"/>
           </p14:sldIdLst>
         </p14:section>
-        <p14:section name="Break" id="{f5f8c794-9a9f-736e-1f0f-7df5bd14e823}">
+        <p14:section name="Break" id="{0afe78fc-b208-9963-4c12-ca555de5c5d9}">
           <p14:sldIdLst>
             <p14:sldId id="267"/>
           </p14:sldIdLst>
         </p14:section>
-        <p14:section name="Block A" id="{527b5d85-f327-5c9a-32bc-f1bdde6ba359}">
+        <p14:section name="Block A" id="{847e4bfa-9868-b1c8-9897-2049c412cd33}">
           <p14:sldIdLst/>
         </p14:section>
-        <p14:section name="Block B" id="{556f0e09-fa40-1da0-02ed-a82427f19a6c}">
+        <p14:section name="Block B" id="{f94bd0b9-99a2-58d9-3462-6242269cbf31}">
           <p14:sldIdLst>
             <p14:sldId id="270"/>
             <p14:sldId id="271"/>
@@ -168,7 +168,7 @@
             <p14:sldId id="275"/>
           </p14:sldIdLst>
         </p14:section>
-        <p14:section name="Make and close" id="{6f231fe1-b1d5-89fa-54a9-1c53e36b5a86}">
+        <p14:section name="Make and close" id="{43836291-3816-5056-d863-bd26b0fb2939}">
           <p14:sldIdLst>
             <p14:sldId id="276"/>
             <p14:sldId id="277"/>

--- a/Schools_ML_Track/camp_2026/slides/DA/DA09.pptx
+++ b/Schools_ML_Track/camp_2026/slides/DA/DA09.pptx
@@ -129,7 +129,7 @@
   <p:extLst>
     <p:ext uri="{521415D9-36F7-43E2-AB2F-B90AF26B5E84}">
       <p14:sectionLst xmlns:p14="http://schemas.microsoft.com/office/powerpoint/2010/main">
-        <p14:section name="Opening" id="{74fa7905-ec8f-fa48-f57a-22f17b8a1659}">
+        <p14:section name="Opening" id="{9524b46f-e833-7265-3123-24a0488557e2}">
           <p14:sldIdLst>
             <p14:sldId id="256"/>
             <p14:sldId id="257"/>
@@ -140,7 +140,7 @@
             <p14:sldId id="262"/>
           </p14:sldIdLst>
         </p14:section>
-        <p14:section name="Block A" id="{d682867d-4174-71b2-fd28-5e06b177c333}">
+        <p14:section name="Block A" id="{e854dde1-189f-25f3-c356-6ed5cfdf6e31}">
           <p14:sldIdLst>
             <p14:sldId id="263"/>
             <p14:sldId id="264"/>
@@ -150,15 +150,15 @@
             <p14:sldId id="269"/>
           </p14:sldIdLst>
         </p14:section>
-        <p14:section name="Break" id="{0afe78fc-b208-9963-4c12-ca555de5c5d9}">
+        <p14:section name="Break" id="{1fbd6a76-7d01-be31-7c02-28ee0b5db7da}">
           <p14:sldIdLst>
             <p14:sldId id="267"/>
           </p14:sldIdLst>
         </p14:section>
-        <p14:section name="Block A" id="{847e4bfa-9868-b1c8-9897-2049c412cd33}">
+        <p14:section name="Block A" id="{83af64c5-36b9-7ea2-20dd-25c3f97affb3}">
           <p14:sldIdLst/>
         </p14:section>
-        <p14:section name="Block B" id="{f94bd0b9-99a2-58d9-3462-6242269cbf31}">
+        <p14:section name="Block B" id="{9926c18d-4f84-a90f-1eec-ee8b298c10be}">
           <p14:sldIdLst>
             <p14:sldId id="270"/>
             <p14:sldId id="271"/>
@@ -168,7 +168,7 @@
             <p14:sldId id="275"/>
           </p14:sldIdLst>
         </p14:section>
-        <p14:section name="Make and close" id="{43836291-3816-5056-d863-bd26b0fb2939}">
+        <p14:section name="Make and close" id="{26e660d1-0383-252d-b06e-cd157858f3ac}">
           <p14:sldIdLst>
             <p14:sldId id="276"/>
             <p14:sldId id="277"/>
@@ -4485,11 +4485,11 @@
         <p:spPr>
           <a:xfrm>
             <a:off x="640080" y="1645920"/>
-            <a:ext cx="10881360" cy="3383280"/>
+            <a:ext cx="10881360" cy="2816352"/>
           </a:xfrm>
           <a:prstGeom prst="roundRect">
             <a:avLst>
-              <a:gd name="adj" fmla="val 2162"/>
+              <a:gd name="adj" fmla="val 2597"/>
             </a:avLst>
           </a:prstGeom>
           <a:solidFill>
@@ -4507,7 +4507,7 @@
         <p:spPr>
           <a:xfrm>
             <a:off x="841248" y="1847088"/>
-            <a:ext cx="10479024" cy="2980944"/>
+            <a:ext cx="10479024" cy="2414016"/>
           </a:xfrm>
           <a:prstGeom prst="rect">
             <a:avLst/>
@@ -4658,9 +4658,6 @@
               </a:rPr>
               <a:t>] * sunrise[</a:t>
             </a:r>
-            <a:endParaRPr lang="en-US" sz="1800" dirty="0"/>
-          </a:p>
-          <a:p>
             <a:pPr algn="l" indent="0" marL="0">
               <a:lnSpc>
                 <a:spcPts val="2340"/>
@@ -4670,13 +4667,13 @@
             <a:r>
               <a:rPr lang="en-US" sz="1800" dirty="0">
                 <a:solidFill>
-                  <a:srgbClr val="FFFFFF"/>
+                  <a:srgbClr val="E0BE36"/>
                 </a:solidFill>
                 <a:latin typeface="Courier New" pitchFamily="34" charset="0"/>
                 <a:ea typeface="Courier New" pitchFamily="34" charset="-122"/>
                 <a:cs typeface="Courier New" pitchFamily="34" charset="-120"/>
               </a:rPr>
-              <a:t>    </a:t>
+              <a:t>"unit_price_ugx"</a:t>
             </a:r>
             <a:pPr algn="l" indent="0" marL="0">
               <a:lnSpc>
@@ -4687,13 +4684,13 @@
             <a:r>
               <a:rPr lang="en-US" sz="1800" dirty="0">
                 <a:solidFill>
-                  <a:srgbClr val="E0BE36"/>
+                  <a:srgbClr val="FFFFFF"/>
                 </a:solidFill>
                 <a:latin typeface="Courier New" pitchFamily="34" charset="0"/>
                 <a:ea typeface="Courier New" pitchFamily="34" charset="-122"/>
                 <a:cs typeface="Courier New" pitchFamily="34" charset="-120"/>
               </a:rPr>
-              <a:t>"unit_price_ugx"</a:t>
+              <a:t>]</a:t>
             </a:r>
             <a:endParaRPr lang="en-US" sz="1800" dirty="0"/>
           </a:p>
@@ -4713,11 +4710,8 @@
                 <a:ea typeface="Courier New" pitchFamily="34" charset="-122"/>
                 <a:cs typeface="Courier New" pitchFamily="34" charset="-120"/>
               </a:rPr>
-              <a:t>]</a:t>
-            </a:r>
-            <a:endParaRPr lang="en-US" sz="1800" dirty="0"/>
-          </a:p>
-          <a:p>
+              <a:t>mean_value = sunrise[</a:t>
+            </a:r>
             <a:pPr algn="l" indent="0" marL="0">
               <a:lnSpc>
                 <a:spcPts val="2340"/>
@@ -4727,13 +4721,13 @@
             <a:r>
               <a:rPr lang="en-US" sz="1800" dirty="0">
                 <a:solidFill>
-                  <a:srgbClr val="FFFFFF"/>
+                  <a:srgbClr val="E0BE36"/>
                 </a:solidFill>
                 <a:latin typeface="Courier New" pitchFamily="34" charset="0"/>
                 <a:ea typeface="Courier New" pitchFamily="34" charset="-122"/>
                 <a:cs typeface="Courier New" pitchFamily="34" charset="-120"/>
               </a:rPr>
-              <a:t>mean_value = sunrise[</a:t>
+              <a:t>"line_value"</a:t>
             </a:r>
             <a:pPr algn="l" indent="0" marL="0">
               <a:lnSpc>
@@ -4744,14 +4738,17 @@
             <a:r>
               <a:rPr lang="en-US" sz="1800" dirty="0">
                 <a:solidFill>
-                  <a:srgbClr val="E0BE36"/>
+                  <a:srgbClr val="FFFFFF"/>
                 </a:solidFill>
                 <a:latin typeface="Courier New" pitchFamily="34" charset="0"/>
                 <a:ea typeface="Courier New" pitchFamily="34" charset="-122"/>
                 <a:cs typeface="Courier New" pitchFamily="34" charset="-120"/>
               </a:rPr>
-              <a:t>"line_value"</a:t>
-            </a:r>
+              <a:t>].mean()</a:t>
+            </a:r>
+            <a:endParaRPr lang="en-US" sz="1800" dirty="0"/>
+          </a:p>
+          <a:p>
             <a:pPr algn="l" indent="0" marL="0">
               <a:lnSpc>
                 <a:spcPts val="2340"/>
@@ -4767,11 +4764,8 @@
                 <a:ea typeface="Courier New" pitchFamily="34" charset="-122"/>
                 <a:cs typeface="Courier New" pitchFamily="34" charset="-120"/>
               </a:rPr>
-              <a:t>].mean()</a:t>
-            </a:r>
-            <a:endParaRPr lang="en-US" sz="1800" dirty="0"/>
-          </a:p>
-          <a:p>
+              <a:t>median_value = sunrise[</a:t>
+            </a:r>
             <a:pPr algn="l" indent="0" marL="0">
               <a:lnSpc>
                 <a:spcPts val="2340"/>
@@ -4781,13 +4775,13 @@
             <a:r>
               <a:rPr lang="en-US" sz="1800" dirty="0">
                 <a:solidFill>
-                  <a:srgbClr val="FFFFFF"/>
+                  <a:srgbClr val="E0BE36"/>
                 </a:solidFill>
                 <a:latin typeface="Courier New" pitchFamily="34" charset="0"/>
                 <a:ea typeface="Courier New" pitchFamily="34" charset="-122"/>
                 <a:cs typeface="Courier New" pitchFamily="34" charset="-120"/>
               </a:rPr>
-              <a:t>median_value = sunrise[</a:t>
+              <a:t>"line_value"</a:t>
             </a:r>
             <a:pPr algn="l" indent="0" marL="0">
               <a:lnSpc>
@@ -4798,14 +4792,17 @@
             <a:r>
               <a:rPr lang="en-US" sz="1800" dirty="0">
                 <a:solidFill>
-                  <a:srgbClr val="E0BE36"/>
+                  <a:srgbClr val="FFFFFF"/>
                 </a:solidFill>
                 <a:latin typeface="Courier New" pitchFamily="34" charset="0"/>
                 <a:ea typeface="Courier New" pitchFamily="34" charset="-122"/>
                 <a:cs typeface="Courier New" pitchFamily="34" charset="-120"/>
               </a:rPr>
-              <a:t>"line_value"</a:t>
-            </a:r>
+              <a:t>].median()</a:t>
+            </a:r>
+            <a:endParaRPr lang="en-US" sz="1800" dirty="0"/>
+          </a:p>
+          <a:p>
             <a:pPr algn="l" indent="0" marL="0">
               <a:lnSpc>
                 <a:spcPts val="2340"/>
@@ -4821,11 +4818,8 @@
                 <a:ea typeface="Courier New" pitchFamily="34" charset="-122"/>
                 <a:cs typeface="Courier New" pitchFamily="34" charset="-120"/>
               </a:rPr>
-              <a:t>].median()</a:t>
-            </a:r>
-            <a:endParaRPr lang="en-US" sz="1800" dirty="0"/>
-          </a:p>
-          <a:p>
+              <a:t>bulk = (sunrise[</a:t>
+            </a:r>
             <a:pPr algn="l" indent="0" marL="0">
               <a:lnSpc>
                 <a:spcPts val="2340"/>
@@ -4835,13 +4829,13 @@
             <a:r>
               <a:rPr lang="en-US" sz="1800" dirty="0">
                 <a:solidFill>
-                  <a:srgbClr val="FFFFFF"/>
+                  <a:srgbClr val="E0BE36"/>
                 </a:solidFill>
                 <a:latin typeface="Courier New" pitchFamily="34" charset="0"/>
                 <a:ea typeface="Courier New" pitchFamily="34" charset="-122"/>
                 <a:cs typeface="Courier New" pitchFamily="34" charset="-120"/>
               </a:rPr>
-              <a:t>bulk = (sunrise[</a:t>
+              <a:t>"units"</a:t>
             </a:r>
             <a:pPr algn="l" indent="0" marL="0">
               <a:lnSpc>
@@ -4852,14 +4846,17 @@
             <a:r>
               <a:rPr lang="en-US" sz="1800" dirty="0">
                 <a:solidFill>
-                  <a:srgbClr val="E0BE36"/>
+                  <a:srgbClr val="FFFFFF"/>
                 </a:solidFill>
                 <a:latin typeface="Courier New" pitchFamily="34" charset="0"/>
                 <a:ea typeface="Courier New" pitchFamily="34" charset="-122"/>
                 <a:cs typeface="Courier New" pitchFamily="34" charset="-120"/>
               </a:rPr>
-              <a:t>"units"</a:t>
-            </a:r>
+              <a:t>] &gt;= 10).sum()</a:t>
+            </a:r>
+            <a:endParaRPr lang="en-US" sz="1800" dirty="0"/>
+          </a:p>
+          <a:p>
             <a:pPr algn="l" indent="0" marL="0">
               <a:lnSpc>
                 <a:spcPts val="2340"/>
@@ -4875,7 +4872,7 @@
                 <a:ea typeface="Courier New" pitchFamily="34" charset="-122"/>
                 <a:cs typeface="Courier New" pitchFamily="34" charset="-120"/>
               </a:rPr>
-              <a:t>] &gt;= 10).sum()</a:t>
+              <a:t>share = bulk / len(sunrise)</a:t>
             </a:r>
             <a:endParaRPr lang="en-US" sz="1800" dirty="0"/>
           </a:p>
@@ -4895,7 +4892,7 @@
                 <a:ea typeface="Courier New" pitchFamily="34" charset="-122"/>
                 <a:cs typeface="Courier New" pitchFamily="34" charset="-120"/>
               </a:rPr>
-              <a:t>share = bulk / len(sunrise)</a:t>
+              <a:t>print(round(mean_value), median_value)</a:t>
             </a:r>
             <a:endParaRPr lang="en-US" sz="1800" dirty="0"/>
           </a:p>
@@ -4915,26 +4912,6 @@
                 <a:ea typeface="Courier New" pitchFamily="34" charset="-122"/>
                 <a:cs typeface="Courier New" pitchFamily="34" charset="-120"/>
               </a:rPr>
-              <a:t>print(round(mean_value), median_value)</a:t>
-            </a:r>
-            <a:endParaRPr lang="en-US" sz="1800" dirty="0"/>
-          </a:p>
-          <a:p>
-            <a:pPr algn="l" indent="0" marL="0">
-              <a:lnSpc>
-                <a:spcPts val="2340"/>
-              </a:lnSpc>
-              <a:buNone/>
-            </a:pPr>
-            <a:r>
-              <a:rPr lang="en-US" sz="1800" dirty="0">
-                <a:solidFill>
-                  <a:srgbClr val="FFFFFF"/>
-                </a:solidFill>
-                <a:latin typeface="Courier New" pitchFamily="34" charset="0"/>
-                <a:ea typeface="Courier New" pitchFamily="34" charset="-122"/>
-                <a:cs typeface="Courier New" pitchFamily="34" charset="-120"/>
-              </a:rPr>
               <a:t>print(bulk, len(sunrise), round(share * 100, 1))</a:t>
             </a:r>
             <a:endParaRPr lang="en-US" sz="1800" dirty="0"/>
@@ -4949,8 +4926,8 @@
         </p:nvSpPr>
         <p:spPr>
           <a:xfrm>
-            <a:off x="640080" y="5212080"/>
-            <a:ext cx="8046720" cy="1051560"/>
+            <a:off x="640080" y="4645152"/>
+            <a:ext cx="8046720" cy="1618488"/>
           </a:xfrm>
           <a:prstGeom prst="rect">
             <a:avLst/>
@@ -4964,7 +4941,7 @@
           <a:p>
             <a:pPr algn="l" indent="0" marL="0">
               <a:lnSpc>
-                <a:spcPts val="2400"/>
+                <a:spcPts val="3120"/>
               </a:lnSpc>
               <a:spcAft>
                 <a:spcPts val="1010"/>
@@ -4972,7 +4949,7 @@
               <a:buNone/>
             </a:pPr>
             <a:r>
-              <a:rPr lang="en-US" sz="2000" dirty="0">
+              <a:rPr lang="en-US" sz="2600" dirty="0">
                 <a:solidFill>
                   <a:srgbClr val="111111"/>
                 </a:solidFill>
@@ -4982,12 +4959,12 @@
               </a:rPr>
               <a:t>Predict whether the mean sale value is above or below the median.</a:t>
             </a:r>
-            <a:endParaRPr lang="en-US" sz="2000" dirty="0"/>
-          </a:p>
-          <a:p>
-            <a:pPr algn="l" indent="0" marL="0">
-              <a:lnSpc>
-                <a:spcPts val="2400"/>
+            <a:endParaRPr lang="en-US" sz="2600" dirty="0"/>
+          </a:p>
+          <a:p>
+            <a:pPr algn="l" indent="0" marL="0">
+              <a:lnSpc>
+                <a:spcPts val="3120"/>
               </a:lnSpc>
               <a:spcAft>
                 <a:spcPts val="1010"/>
@@ -4995,7 +4972,7 @@
               <a:buNone/>
             </a:pPr>
             <a:r>
-              <a:rPr lang="en-US" sz="2000" dirty="0">
+              <a:rPr lang="en-US" sz="2600" dirty="0">
                 <a:solidFill>
                   <a:srgbClr val="111111"/>
                 </a:solidFill>
@@ -5005,7 +4982,7 @@
               </a:rPr>
               <a:t>Write your guess on paper before we run it.</a:t>
             </a:r>
-            <a:endParaRPr lang="en-US" sz="2000" dirty="0"/>
+            <a:endParaRPr lang="en-US" sz="2600" dirty="0"/>
           </a:p>
         </p:txBody>
       </p:sp>
@@ -5025,7 +5002,7 @@
         </p:blipFill>
         <p:spPr>
           <a:xfrm>
-            <a:off x="10241280" y="5214366"/>
+            <a:off x="10241280" y="5031486"/>
             <a:ext cx="1188720" cy="1046988"/>
           </a:xfrm>
           <a:prstGeom prst="rect">
@@ -6463,15 +6440,15 @@
           <a:p>
             <a:pPr algn="l" indent="0" marL="0">
               <a:lnSpc>
-                <a:spcPts val="3600"/>
+                <a:spcPts val="3240"/>
               </a:lnSpc>
               <a:spcAft>
-                <a:spcPts val="2520"/>
+                <a:spcPts val="2020"/>
               </a:spcAft>
               <a:buNone/>
             </a:pPr>
             <a:r>
-              <a:rPr lang="en-US" sz="3000" dirty="0">
+              <a:rPr lang="en-US" sz="2700" dirty="0">
                 <a:solidFill>
                   <a:srgbClr val="111111"/>
                 </a:solidFill>
@@ -6479,22 +6456,22 @@
                 <a:ea typeface="Lato" pitchFamily="34" charset="-122"/>
                 <a:cs typeface="Lato" pitchFamily="34" charset="-120"/>
               </a:rPr>
-              <a:t>Add the line_value column and total it for each branch_id in the Sunrise sales. Sort the three totals from largest to smallest. Check that the three totals add up to the overall total.</a:t>
-            </a:r>
-            <a:endParaRPr lang="en-US" sz="3000" dirty="0"/>
-          </a:p>
-          <a:p>
-            <a:pPr algn="l" indent="0" marL="0">
-              <a:lnSpc>
-                <a:spcPts val="3600"/>
+              <a:t>Add the line_value column and total it for each branch_id in the Sunrise sales.</a:t>
+            </a:r>
+            <a:endParaRPr lang="en-US" sz="2700" dirty="0"/>
+          </a:p>
+          <a:p>
+            <a:pPr algn="l" indent="0" marL="0">
+              <a:lnSpc>
+                <a:spcPts val="3240"/>
               </a:lnSpc>
               <a:spcAft>
-                <a:spcPts val="2520"/>
+                <a:spcPts val="2020"/>
               </a:spcAft>
               <a:buNone/>
             </a:pPr>
             <a:r>
-              <a:rPr lang="en-US" sz="3000" dirty="0">
+              <a:rPr lang="en-US" sz="2700" dirty="0">
                 <a:solidFill>
                   <a:srgbClr val="111111"/>
                 </a:solidFill>
@@ -6502,9 +6479,55 @@
                 <a:ea typeface="Lato" pitchFamily="34" charset="-122"/>
                 <a:cs typeface="Lato" pitchFamily="34" charset="-120"/>
               </a:rPr>
+              <a:t>Sort the three totals from largest to smallest.</a:t>
+            </a:r>
+            <a:endParaRPr lang="en-US" sz="2700" dirty="0"/>
+          </a:p>
+          <a:p>
+            <a:pPr algn="l" indent="0" marL="0">
+              <a:lnSpc>
+                <a:spcPts val="3240"/>
+              </a:lnSpc>
+              <a:spcAft>
+                <a:spcPts val="2020"/>
+              </a:spcAft>
+              <a:buNone/>
+            </a:pPr>
+            <a:r>
+              <a:rPr lang="en-US" sz="2700" dirty="0">
+                <a:solidFill>
+                  <a:srgbClr val="111111"/>
+                </a:solidFill>
+                <a:latin typeface="Lato" pitchFamily="34" charset="0"/>
+                <a:ea typeface="Lato" pitchFamily="34" charset="-122"/>
+                <a:cs typeface="Lato" pitchFamily="34" charset="-120"/>
+              </a:rPr>
+              <a:t>Check that the three totals add up to the overall total.</a:t>
+            </a:r>
+            <a:endParaRPr lang="en-US" sz="2700" dirty="0"/>
+          </a:p>
+          <a:p>
+            <a:pPr algn="l" indent="0" marL="0">
+              <a:lnSpc>
+                <a:spcPts val="3240"/>
+              </a:lnSpc>
+              <a:spcAft>
+                <a:spcPts val="2020"/>
+              </a:spcAft>
+              <a:buNone/>
+            </a:pPr>
+            <a:r>
+              <a:rPr lang="en-US" sz="2700" dirty="0">
+                <a:solidFill>
+                  <a:srgbClr val="111111"/>
+                </a:solidFill>
+                <a:latin typeface="Lato" pitchFamily="34" charset="0"/>
+                <a:ea typeface="Lato" pitchFamily="34" charset="-122"/>
+                <a:cs typeface="Lato" pitchFamily="34" charset="-120"/>
+              </a:rPr>
               <a:t>Save it as DA09. Write two sentences: what you changed and how you checked it.</a:t>
             </a:r>
-            <a:endParaRPr lang="en-US" sz="3000" dirty="0"/>
+            <a:endParaRPr lang="en-US" sz="2700" dirty="0"/>
           </a:p>
         </p:txBody>
       </p:sp>
